--- a/V6主採業務範疇說明_20260908_v2.pptx
+++ b/V6主採業務範疇說明_20260908_v2.pptx
@@ -17546,7 +17546,7 @@
         </p:nvGraphicFramePr>
         <p:xfrm>
           <a:off x="566928" y="1536192"/>
-          <a:ext cx="11055096" cy="3931920"/>
+          <a:ext cx="11055096" cy="4114800"/>
         </p:xfrm>
         <a:graphic>
           <a:graphicData uri="http://schemas.openxmlformats.org/drawingml/2006/table">
@@ -17575,7 +17575,7 @@
                   </a:extLst>
                 </a:gridCol>
               </a:tblGrid>
-              <a:tr h="786384">
+              <a:tr h="457200">
                 <a:tc>
                   <a:txBody>
                     <a:bodyPr/>
@@ -17786,7 +17786,7 @@
                   </a:ext>
                 </a:extLst>
               </a:tr>
-              <a:tr h="786384">
+              <a:tr h="731520">
                 <a:tc>
                   <a:txBody>
                     <a:bodyPr/>
@@ -17997,7 +17997,7 @@
                   </a:ext>
                 </a:extLst>
               </a:tr>
-              <a:tr h="786384">
+              <a:tr h="731520">
                 <a:tc>
                   <a:txBody>
                     <a:bodyPr/>
@@ -18208,7 +18208,7 @@
                   </a:ext>
                 </a:extLst>
               </a:tr>
-              <a:tr h="786384">
+              <a:tr h="731520">
                 <a:tc>
                   <a:txBody>
                     <a:bodyPr/>
@@ -18419,7 +18419,7 @@
                   </a:ext>
                 </a:extLst>
               </a:tr>
-              <a:tr h="786384">
+              <a:tr h="731520">
                 <a:tc>
                   <a:txBody>
                     <a:bodyPr/>
@@ -18630,6 +18630,217 @@
                   </a:ext>
                 </a:extLst>
               </a:tr>
+              <a:tr h="731520">
+                <a:tc>
+                  <a:txBody>
+                    <a:bodyPr/>
+                    <a:lstStyle/>
+                    <a:p>
+                      <a:pPr marL="0" indent="0" algn="l">
+                        <a:buNone/>
+                      </a:pPr>
+                      <a:r>
+                        <a:rPr lang="en-US" sz="1100" dirty="0">
+                          <a:solidFill>
+                            <a:srgbClr val="1C4F8F"/>
+                          </a:solidFill>
+                          <a:latin typeface="微軟正黑體" pitchFamily="34" charset="0"/>
+                          <a:ea typeface="微軟正黑體" pitchFamily="34" charset="-122"/>
+                          <a:cs typeface="微軟正黑體" pitchFamily="34" charset="-120"/>
+                        </a:rPr>
+                        <a:t>海空運費比較 產出工具</a:t>
+                      </a:r>
+                      <a:endParaRPr lang="en-US" sz="1100" dirty="0">
+                        <a:latin typeface="微軟正黑體" charset="0"/>
+                        <a:ea typeface="微軟正黑體" charset="0"/>
+                        <a:cs typeface="微軟正黑體" charset="0"/>
+                      </a:endParaRPr>
+                    </a:p>
+                  </a:txBody>
+                  <a:tcPr anchor="ctr">
+                    <a:lnL w="6350" cap="flat" cmpd="sng" algn="ctr">
+                      <a:solidFill>
+                        <a:srgbClr val="DDE3EE"/>
+                      </a:solidFill>
+                      <a:prstDash val="solid"/>
+                      <a:round/>
+                      <a:headEnd type="none" w="med" len="med"/>
+                      <a:tailEnd type="none" w="med" len="med"/>
+                    </a:lnL>
+                    <a:lnR w="6350" cap="flat" cmpd="sng" algn="ctr">
+                      <a:solidFill>
+                        <a:srgbClr val="DDE3EE"/>
+                      </a:solidFill>
+                      <a:prstDash val="solid"/>
+                      <a:round/>
+                      <a:headEnd type="none" w="med" len="med"/>
+                      <a:tailEnd type="none" w="med" len="med"/>
+                    </a:lnR>
+                    <a:lnT w="6350" cap="flat" cmpd="sng" algn="ctr">
+                      <a:solidFill>
+                        <a:srgbClr val="DDE3EE"/>
+                      </a:solidFill>
+                      <a:prstDash val="solid"/>
+                      <a:round/>
+                      <a:headEnd type="none" w="med" len="med"/>
+                      <a:tailEnd type="none" w="med" len="med"/>
+                    </a:lnT>
+                    <a:lnB w="6350" cap="flat" cmpd="sng" algn="ctr">
+                      <a:solidFill>
+                        <a:srgbClr val="DDE3EE"/>
+                      </a:solidFill>
+                      <a:prstDash val="solid"/>
+                      <a:round/>
+                      <a:headEnd type="none" w="med" len="med"/>
+                      <a:tailEnd type="none" w="med" len="med"/>
+                    </a:lnB>
+                    <a:solidFill>
+                      <a:srgbClr val="E8F1FC"/>
+                    </a:solidFill>
+                  </a:tcPr>
+                </a:tc>
+                <a:tc>
+                  <a:txBody>
+                    <a:bodyPr/>
+                    <a:lstStyle/>
+                    <a:p>
+                      <a:pPr marL="0" indent="0" algn="l">
+                        <a:buNone/>
+                      </a:pPr>
+                      <a:r>
+                        <a:rPr lang="en-US" sz="1100" dirty="0">
+                          <a:solidFill>
+                            <a:srgbClr val="1C4F8F"/>
+                          </a:solidFill>
+                          <a:latin typeface="微軟正黑體" pitchFamily="34" charset="0"/>
+                          <a:ea typeface="微軟正黑體" pitchFamily="34" charset="-122"/>
+                          <a:cs typeface="微軟正黑體" pitchFamily="34" charset="-120"/>
+                        </a:rPr>
+                        <a:t>查詢海／空運報價，選定報價後產出符合原始格式的「海空運費比較」Excel</a:t>
+                      </a:r>
+                      <a:endParaRPr lang="en-US" sz="1100" dirty="0">
+                        <a:latin typeface="微軟正黑體" charset="0"/>
+                        <a:ea typeface="微軟正黑體" charset="0"/>
+                        <a:cs typeface="微軟正黑體" charset="0"/>
+                      </a:endParaRPr>
+                    </a:p>
+                  </a:txBody>
+                  <a:tcPr anchor="ctr">
+                    <a:lnL w="6350" cap="flat" cmpd="sng" algn="ctr">
+                      <a:solidFill>
+                        <a:srgbClr val="DDE3EE"/>
+                      </a:solidFill>
+                      <a:prstDash val="solid"/>
+                      <a:round/>
+                      <a:headEnd type="none" w="med" len="med"/>
+                      <a:tailEnd type="none" w="med" len="med"/>
+                    </a:lnL>
+                    <a:lnR w="6350" cap="flat" cmpd="sng" algn="ctr">
+                      <a:solidFill>
+                        <a:srgbClr val="DDE3EE"/>
+                      </a:solidFill>
+                      <a:prstDash val="solid"/>
+                      <a:round/>
+                      <a:headEnd type="none" w="med" len="med"/>
+                      <a:tailEnd type="none" w="med" len="med"/>
+                    </a:lnR>
+                    <a:lnT w="6350" cap="flat" cmpd="sng" algn="ctr">
+                      <a:solidFill>
+                        <a:srgbClr val="DDE3EE"/>
+                      </a:solidFill>
+                      <a:prstDash val="solid"/>
+                      <a:round/>
+                      <a:headEnd type="none" w="med" len="med"/>
+                      <a:tailEnd type="none" w="med" len="med"/>
+                    </a:lnT>
+                    <a:lnB w="6350" cap="flat" cmpd="sng" algn="ctr">
+                      <a:solidFill>
+                        <a:srgbClr val="DDE3EE"/>
+                      </a:solidFill>
+                      <a:prstDash val="solid"/>
+                      <a:round/>
+                      <a:headEnd type="none" w="med" len="med"/>
+                      <a:tailEnd type="none" w="med" len="med"/>
+                    </a:lnB>
+                    <a:solidFill>
+                      <a:srgbClr val="E8F1FC"/>
+                    </a:solidFill>
+                  </a:tcPr>
+                </a:tc>
+                <a:tc>
+                  <a:txBody>
+                    <a:bodyPr/>
+                    <a:lstStyle/>
+                    <a:p>
+                      <a:pPr marL="0" indent="0" algn="l">
+                        <a:buNone/>
+                      </a:pPr>
+                      <a:r>
+                        <a:rPr lang="en-US" sz="1100" dirty="0">
+                          <a:solidFill>
+                            <a:srgbClr val="1C4F8F"/>
+                          </a:solidFill>
+                          <a:latin typeface="微軟正黑體" pitchFamily="34" charset="0"/>
+                          <a:ea typeface="微軟正黑體" pitchFamily="34" charset="-122"/>
+                          <a:cs typeface="微軟正黑體" pitchFamily="34" charset="-120"/>
+                        </a:rPr>
+                        <a:t>選哪一家、走海運或空運，仍須依當下產能、船期與交期風險判斷</a:t>
+                      </a:r>
+                      <a:endParaRPr lang="en-US" sz="1100" dirty="0">
+                        <a:latin typeface="微軟正黑體" charset="0"/>
+                        <a:ea typeface="微軟正黑體" charset="0"/>
+                        <a:cs typeface="微軟正黑體" charset="0"/>
+                      </a:endParaRPr>
+                    </a:p>
+                  </a:txBody>
+                  <a:tcPr anchor="ctr">
+                    <a:lnL w="6350" cap="flat" cmpd="sng" algn="ctr">
+                      <a:solidFill>
+                        <a:srgbClr val="DDE3EE"/>
+                      </a:solidFill>
+                      <a:prstDash val="solid"/>
+                      <a:round/>
+                      <a:headEnd type="none" w="med" len="med"/>
+                      <a:tailEnd type="none" w="med" len="med"/>
+                    </a:lnL>
+                    <a:lnR w="6350" cap="flat" cmpd="sng" algn="ctr">
+                      <a:solidFill>
+                        <a:srgbClr val="DDE3EE"/>
+                      </a:solidFill>
+                      <a:prstDash val="solid"/>
+                      <a:round/>
+                      <a:headEnd type="none" w="med" len="med"/>
+                      <a:tailEnd type="none" w="med" len="med"/>
+                    </a:lnR>
+                    <a:lnT w="6350" cap="flat" cmpd="sng" algn="ctr">
+                      <a:solidFill>
+                        <a:srgbClr val="DDE3EE"/>
+                      </a:solidFill>
+                      <a:prstDash val="solid"/>
+                      <a:round/>
+                      <a:headEnd type="none" w="med" len="med"/>
+                      <a:tailEnd type="none" w="med" len="med"/>
+                    </a:lnT>
+                    <a:lnB w="6350" cap="flat" cmpd="sng" algn="ctr">
+                      <a:solidFill>
+                        <a:srgbClr val="DDE3EE"/>
+                      </a:solidFill>
+                      <a:prstDash val="solid"/>
+                      <a:round/>
+                      <a:headEnd type="none" w="med" len="med"/>
+                      <a:tailEnd type="none" w="med" len="med"/>
+                    </a:lnB>
+                    <a:solidFill>
+                      <a:srgbClr val="E8F1FC"/>
+                    </a:solidFill>
+                  </a:tcPr>
+                </a:tc>
+                <a:extLst>
+                  <a:ext uri="{0D108BD9-81ED-4DB2-BD59-A6C34878D82A}">
+                    <a16:rowId xmlns:a16="http://schemas.microsoft.com/office/drawing/2014/main" val="10004"/>
+                  </a:ext>
+                </a:extLst>
+              </a:tr>
             </a:tbl>
           </a:graphicData>
         </a:graphic>
@@ -18667,7 +18878,7 @@
                 <a:ea typeface="微軟正黑體" pitchFamily="34" charset="-122"/>
                 <a:cs typeface="微軟正黑體" pitchFamily="34" charset="-120"/>
               </a:rPr>
-              <a:t>資料來源：主採團隊現行 Claude Code skill 清單（bl-dyelot-check／ta-invoice-fill／gu-ta-orderqty-fill／gu-cbd-to-ta-tool）。</a:t>
+              <a:t>資料來源：主採團隊現行 Claude Code skill 清單（bl-dyelot-check／ta-invoice-fill／gu-ta-orderqty-fill／gu-cbd-to-ta-tool，另含海空運費比較產出工具）。</a:t>
             </a:r>
             <a:endParaRPr lang="en-US" sz="900" dirty="0"/>
           </a:p>
@@ -18786,7 +18997,7 @@
                 <a:ea typeface="微軟正黑體"/>
                 <a:cs typeface="微軟正黑體"/>
               </a:rPr>
-              <a:t>四支工具接手的都是「比對與填入」；要不要覆蓋、算不算核可、報告能不能寄出，</a:t>
+              <a:t>五支工具接手的都是「比對與填入」；要不要覆蓋、算不算核可、報告能不能寄出，</a:t>
             </a:r>
             <a:r>
               <a:rPr lang="zh-TW" altLang="en-US" sz="1300" b="1" dirty="0">
